--- a/Digital_Piano.pptx
+++ b/Digital_Piano.pptx
@@ -7,6 +7,7 @@
   <p:sldIdLst>
     <p:sldId id="260" r:id="rId2"/>
     <p:sldId id="261" r:id="rId3"/>
+    <p:sldId id="262" r:id="rId4"/>
   </p:sldIdLst>
   <p:sldSz cx="12192000" cy="6858000"/>
   <p:notesSz cx="6858000" cy="9144000"/>
@@ -260,7 +261,7 @@
           <a:p>
             <a:fld id="{400AB406-1A9E-5B4A-93CF-2124615945BA}" type="datetimeFigureOut">
               <a:rPr lang="en-US" smtClean="0"/>
-              <a:t>1/26/22</a:t>
+              <a:t>1/10/24</a:t>
             </a:fld>
             <a:endParaRPr lang="en-US"/>
           </a:p>
@@ -458,7 +459,7 @@
           <a:p>
             <a:fld id="{400AB406-1A9E-5B4A-93CF-2124615945BA}" type="datetimeFigureOut">
               <a:rPr lang="en-US" smtClean="0"/>
-              <a:t>1/26/22</a:t>
+              <a:t>1/10/24</a:t>
             </a:fld>
             <a:endParaRPr lang="en-US"/>
           </a:p>
@@ -666,7 +667,7 @@
           <a:p>
             <a:fld id="{400AB406-1A9E-5B4A-93CF-2124615945BA}" type="datetimeFigureOut">
               <a:rPr lang="en-US" smtClean="0"/>
-              <a:t>1/26/22</a:t>
+              <a:t>1/10/24</a:t>
             </a:fld>
             <a:endParaRPr lang="en-US"/>
           </a:p>
@@ -864,7 +865,7 @@
           <a:p>
             <a:fld id="{400AB406-1A9E-5B4A-93CF-2124615945BA}" type="datetimeFigureOut">
               <a:rPr lang="en-US" smtClean="0"/>
-              <a:t>1/26/22</a:t>
+              <a:t>1/10/24</a:t>
             </a:fld>
             <a:endParaRPr lang="en-US"/>
           </a:p>
@@ -1139,7 +1140,7 @@
           <a:p>
             <a:fld id="{400AB406-1A9E-5B4A-93CF-2124615945BA}" type="datetimeFigureOut">
               <a:rPr lang="en-US" smtClean="0"/>
-              <a:t>1/26/22</a:t>
+              <a:t>1/10/24</a:t>
             </a:fld>
             <a:endParaRPr lang="en-US"/>
           </a:p>
@@ -1404,7 +1405,7 @@
           <a:p>
             <a:fld id="{400AB406-1A9E-5B4A-93CF-2124615945BA}" type="datetimeFigureOut">
               <a:rPr lang="en-US" smtClean="0"/>
-              <a:t>1/26/22</a:t>
+              <a:t>1/10/24</a:t>
             </a:fld>
             <a:endParaRPr lang="en-US"/>
           </a:p>
@@ -1816,7 +1817,7 @@
           <a:p>
             <a:fld id="{400AB406-1A9E-5B4A-93CF-2124615945BA}" type="datetimeFigureOut">
               <a:rPr lang="en-US" smtClean="0"/>
-              <a:t>1/26/22</a:t>
+              <a:t>1/10/24</a:t>
             </a:fld>
             <a:endParaRPr lang="en-US"/>
           </a:p>
@@ -1957,7 +1958,7 @@
           <a:p>
             <a:fld id="{400AB406-1A9E-5B4A-93CF-2124615945BA}" type="datetimeFigureOut">
               <a:rPr lang="en-US" smtClean="0"/>
-              <a:t>1/26/22</a:t>
+              <a:t>1/10/24</a:t>
             </a:fld>
             <a:endParaRPr lang="en-US"/>
           </a:p>
@@ -2070,7 +2071,7 @@
           <a:p>
             <a:fld id="{400AB406-1A9E-5B4A-93CF-2124615945BA}" type="datetimeFigureOut">
               <a:rPr lang="en-US" smtClean="0"/>
-              <a:t>1/26/22</a:t>
+              <a:t>1/10/24</a:t>
             </a:fld>
             <a:endParaRPr lang="en-US"/>
           </a:p>
@@ -2381,7 +2382,7 @@
           <a:p>
             <a:fld id="{400AB406-1A9E-5B4A-93CF-2124615945BA}" type="datetimeFigureOut">
               <a:rPr lang="en-US" smtClean="0"/>
-              <a:t>1/26/22</a:t>
+              <a:t>1/10/24</a:t>
             </a:fld>
             <a:endParaRPr lang="en-US"/>
           </a:p>
@@ -2669,7 +2670,7 @@
           <a:p>
             <a:fld id="{400AB406-1A9E-5B4A-93CF-2124615945BA}" type="datetimeFigureOut">
               <a:rPr lang="en-US" smtClean="0"/>
-              <a:t>1/26/22</a:t>
+              <a:t>1/10/24</a:t>
             </a:fld>
             <a:endParaRPr lang="en-US"/>
           </a:p>
@@ -2910,7 +2911,7 @@
           <a:p>
             <a:fld id="{400AB406-1A9E-5B4A-93CF-2124615945BA}" type="datetimeFigureOut">
               <a:rPr lang="en-US" smtClean="0"/>
-              <a:t>1/26/22</a:t>
+              <a:t>1/10/24</a:t>
             </a:fld>
             <a:endParaRPr lang="en-US"/>
           </a:p>
@@ -4834,6 +4835,374 @@
 </p:sld>
 </file>
 
+<file path=ppt/slides/slide3.xml><?xml version="1.0" encoding="utf-8"?>
+<p:sld xmlns:a="http://schemas.openxmlformats.org/drawingml/2006/main" xmlns:r="http://schemas.openxmlformats.org/officeDocument/2006/relationships" xmlns:p="http://schemas.openxmlformats.org/presentationml/2006/main">
+  <p:cSld>
+    <p:spTree>
+      <p:nvGrpSpPr>
+        <p:cNvPr id="1" name=""/>
+        <p:cNvGrpSpPr/>
+        <p:nvPr/>
+      </p:nvGrpSpPr>
+      <p:grpSpPr>
+        <a:xfrm>
+          <a:off x="0" y="0"/>
+          <a:ext cx="0" cy="0"/>
+          <a:chOff x="0" y="0"/>
+          <a:chExt cx="0" cy="0"/>
+        </a:xfrm>
+      </p:grpSpPr>
+      <p:sp>
+        <p:nvSpPr>
+          <p:cNvPr id="2" name="TextBox 1">
+            <a:extLst>
+              <a:ext uri="{FF2B5EF4-FFF2-40B4-BE49-F238E27FC236}">
+                <a16:creationId xmlns:a16="http://schemas.microsoft.com/office/drawing/2014/main" id="{CCCA8D13-09B7-2749-8F55-7B21F5B2A170}"/>
+              </a:ext>
+            </a:extLst>
+          </p:cNvPr>
+          <p:cNvSpPr txBox="1"/>
+          <p:nvPr/>
+        </p:nvSpPr>
+        <p:spPr>
+          <a:xfrm>
+            <a:off x="-1" y="0"/>
+            <a:ext cx="6917635" cy="523220"/>
+          </a:xfrm>
+          <a:prstGeom prst="rect">
+            <a:avLst/>
+          </a:prstGeom>
+          <a:noFill/>
+        </p:spPr>
+        <p:txBody>
+          <a:bodyPr wrap="square" rtlCol="0">
+            <a:spAutoFit/>
+          </a:bodyPr>
+          <a:lstStyle/>
+          <a:p>
+            <a:r>
+              <a:rPr lang="en-US" sz="2800" b="1" dirty="0"/>
+              <a:t>Speakers</a:t>
+            </a:r>
+            <a:endParaRPr lang="en-US" sz="1600" b="1" dirty="0"/>
+          </a:p>
+        </p:txBody>
+      </p:sp>
+      <p:sp>
+        <p:nvSpPr>
+          <p:cNvPr id="3" name="TextBox 2">
+            <a:extLst>
+              <a:ext uri="{FF2B5EF4-FFF2-40B4-BE49-F238E27FC236}">
+                <a16:creationId xmlns:a16="http://schemas.microsoft.com/office/drawing/2014/main" id="{559A0DB4-E6EE-F64B-ACAB-1439F7C02404}"/>
+              </a:ext>
+            </a:extLst>
+          </p:cNvPr>
+          <p:cNvSpPr txBox="1"/>
+          <p:nvPr/>
+        </p:nvSpPr>
+        <p:spPr>
+          <a:xfrm>
+            <a:off x="1917308" y="5379482"/>
+            <a:ext cx="4664429" cy="954107"/>
+          </a:xfrm>
+          <a:prstGeom prst="rect">
+            <a:avLst/>
+          </a:prstGeom>
+          <a:noFill/>
+        </p:spPr>
+        <p:txBody>
+          <a:bodyPr wrap="square" rtlCol="0">
+            <a:spAutoFit/>
+          </a:bodyPr>
+          <a:lstStyle/>
+          <a:p>
+            <a:r>
+              <a:rPr lang="en-US" sz="1400" dirty="0">
+                <a:latin typeface="Calibri" panose="020F0502020204030204" pitchFamily="34" charset="0"/>
+                <a:cs typeface="Calibri" panose="020F0502020204030204" pitchFamily="34" charset="0"/>
+              </a:rPr>
+              <a:t>Behringer </a:t>
+            </a:r>
+            <a:r>
+              <a:rPr lang="en-US" sz="1400" dirty="0" err="1">
+                <a:latin typeface="Calibri" panose="020F0502020204030204" pitchFamily="34" charset="0"/>
+                <a:cs typeface="Calibri" panose="020F0502020204030204" pitchFamily="34" charset="0"/>
+              </a:rPr>
+              <a:t>Eurolive</a:t>
+            </a:r>
+            <a:r>
+              <a:rPr lang="en-US" sz="1400" dirty="0">
+                <a:latin typeface="Calibri" panose="020F0502020204030204" pitchFamily="34" charset="0"/>
+                <a:cs typeface="Calibri" panose="020F0502020204030204" pitchFamily="34" charset="0"/>
+              </a:rPr>
+              <a:t> B112D 1000W 12 inch Powered Speaker</a:t>
+            </a:r>
+            <a:br>
+              <a:rPr lang="en-US" sz="1400" dirty="0">
+                <a:latin typeface="Calibri" panose="020F0502020204030204" pitchFamily="34" charset="0"/>
+                <a:cs typeface="Calibri" panose="020F0502020204030204" pitchFamily="34" charset="0"/>
+              </a:rPr>
+            </a:br>
+            <a:r>
+              <a:rPr lang="en-US" sz="1400" dirty="0">
+                <a:latin typeface="Calibri" panose="020F0502020204030204" pitchFamily="34" charset="0"/>
+                <a:cs typeface="Calibri" panose="020F0502020204030204" pitchFamily="34" charset="0"/>
+              </a:rPr>
+              <a:t>buy at </a:t>
+            </a:r>
+            <a:r>
+              <a:rPr lang="en-US" sz="1400" dirty="0" err="1">
+                <a:latin typeface="Calibri" panose="020F0502020204030204" pitchFamily="34" charset="0"/>
+                <a:cs typeface="Calibri" panose="020F0502020204030204" pitchFamily="34" charset="0"/>
+              </a:rPr>
+              <a:t>Sweetwater.com</a:t>
+            </a:r>
+            <a:endParaRPr lang="en-US" sz="1400" dirty="0">
+              <a:latin typeface="Calibri" panose="020F0502020204030204" pitchFamily="34" charset="0"/>
+              <a:cs typeface="Calibri" panose="020F0502020204030204" pitchFamily="34" charset="0"/>
+            </a:endParaRPr>
+          </a:p>
+          <a:p>
+            <a:r>
+              <a:rPr lang="en-US" sz="1400" dirty="0">
+                <a:latin typeface="Calibri" panose="020F0502020204030204" pitchFamily="34" charset="0"/>
+                <a:cs typeface="Calibri" panose="020F0502020204030204" pitchFamily="34" charset="0"/>
+              </a:rPr>
+              <a:t>Inputs - 2 x XLR/TRS Combo</a:t>
+            </a:r>
+          </a:p>
+          <a:p>
+            <a:r>
+              <a:rPr lang="en-US" sz="1400" dirty="0">
+                <a:latin typeface="Calibri" panose="020F0502020204030204" pitchFamily="34" charset="0"/>
+                <a:cs typeface="Calibri" panose="020F0502020204030204" pitchFamily="34" charset="0"/>
+              </a:rPr>
+              <a:t>Output - XLR</a:t>
+            </a:r>
+          </a:p>
+        </p:txBody>
+      </p:sp>
+      <p:pic>
+        <p:nvPicPr>
+          <p:cNvPr id="1026" name="Picture 2" descr="New Sealed Box Gateway G-Max 2000 Multimedia Stereo Speakers">
+            <a:extLst>
+              <a:ext uri="{FF2B5EF4-FFF2-40B4-BE49-F238E27FC236}">
+                <a16:creationId xmlns:a16="http://schemas.microsoft.com/office/drawing/2014/main" id="{FC1455A5-BACC-9307-328D-BFAACE2A4044}"/>
+              </a:ext>
+            </a:extLst>
+          </p:cNvPr>
+          <p:cNvPicPr>
+            <a:picLocks noChangeAspect="1" noChangeArrowheads="1"/>
+          </p:cNvPicPr>
+          <p:nvPr/>
+        </p:nvPicPr>
+        <p:blipFill>
+          <a:blip r:embed="rId2">
+            <a:extLst>
+              <a:ext uri="{28A0092B-C50C-407E-A947-70E740481C1C}">
+                <a14:useLocalDpi xmlns:a14="http://schemas.microsoft.com/office/drawing/2010/main"/>
+              </a:ext>
+            </a:extLst>
+          </a:blip>
+          <a:srcRect/>
+          <a:stretch>
+            <a:fillRect/>
+          </a:stretch>
+        </p:blipFill>
+        <p:spPr bwMode="auto">
+          <a:xfrm>
+            <a:off x="8225229" y="848200"/>
+            <a:ext cx="3810000" cy="2146300"/>
+          </a:xfrm>
+          <a:prstGeom prst="rect">
+            <a:avLst/>
+          </a:prstGeom>
+          <a:noFill/>
+          <a:extLst>
+            <a:ext uri="{909E8E84-426E-40DD-AFC4-6F175D3DCCD1}">
+              <a14:hiddenFill xmlns:a14="http://schemas.microsoft.com/office/drawing/2010/main">
+                <a:solidFill>
+                  <a:srgbClr val="FFFFFF"/>
+                </a:solidFill>
+              </a14:hiddenFill>
+            </a:ext>
+          </a:extLst>
+        </p:spPr>
+      </p:pic>
+      <p:pic>
+        <p:nvPicPr>
+          <p:cNvPr id="1028" name="Picture 4" descr="behringer eurolive b112d 1000w 12 inch powered speaker 1">
+            <a:extLst>
+              <a:ext uri="{FF2B5EF4-FFF2-40B4-BE49-F238E27FC236}">
+                <a16:creationId xmlns:a16="http://schemas.microsoft.com/office/drawing/2014/main" id="{14CA0309-019F-D844-A1E4-5B55C0899B5F}"/>
+              </a:ext>
+            </a:extLst>
+          </p:cNvPr>
+          <p:cNvPicPr>
+            <a:picLocks noChangeAspect="1" noChangeArrowheads="1"/>
+          </p:cNvPicPr>
+          <p:nvPr/>
+        </p:nvPicPr>
+        <p:blipFill>
+          <a:blip r:embed="rId3" cstate="email">
+            <a:extLst>
+              <a:ext uri="{28A0092B-C50C-407E-A947-70E740481C1C}">
+                <a14:useLocalDpi xmlns:a14="http://schemas.microsoft.com/office/drawing/2010/main"/>
+              </a:ext>
+            </a:extLst>
+          </a:blip>
+          <a:srcRect/>
+          <a:stretch>
+            <a:fillRect/>
+          </a:stretch>
+        </p:blipFill>
+        <p:spPr bwMode="auto">
+          <a:xfrm>
+            <a:off x="225677" y="679187"/>
+            <a:ext cx="2415538" cy="4375313"/>
+          </a:xfrm>
+          <a:prstGeom prst="rect">
+            <a:avLst/>
+          </a:prstGeom>
+          <a:noFill/>
+          <a:extLst>
+            <a:ext uri="{909E8E84-426E-40DD-AFC4-6F175D3DCCD1}">
+              <a14:hiddenFill xmlns:a14="http://schemas.microsoft.com/office/drawing/2010/main">
+                <a:solidFill>
+                  <a:srgbClr val="FFFFFF"/>
+                </a:solidFill>
+              </a14:hiddenFill>
+            </a:ext>
+          </a:extLst>
+        </p:spPr>
+      </p:pic>
+      <p:sp>
+        <p:nvSpPr>
+          <p:cNvPr id="9" name="TextBox 8">
+            <a:extLst>
+              <a:ext uri="{FF2B5EF4-FFF2-40B4-BE49-F238E27FC236}">
+                <a16:creationId xmlns:a16="http://schemas.microsoft.com/office/drawing/2014/main" id="{17D6BB15-37DA-C498-CBFD-7BD1471E3590}"/>
+              </a:ext>
+            </a:extLst>
+          </p:cNvPr>
+          <p:cNvSpPr txBox="1"/>
+          <p:nvPr/>
+        </p:nvSpPr>
+        <p:spPr>
+          <a:xfrm>
+            <a:off x="8135986" y="3114373"/>
+            <a:ext cx="4091385" cy="523220"/>
+          </a:xfrm>
+          <a:prstGeom prst="rect">
+            <a:avLst/>
+          </a:prstGeom>
+          <a:noFill/>
+        </p:spPr>
+        <p:txBody>
+          <a:bodyPr wrap="square" rtlCol="0">
+            <a:spAutoFit/>
+          </a:bodyPr>
+          <a:lstStyle/>
+          <a:p>
+            <a:r>
+              <a:rPr lang="en-US" sz="1400" b="0" i="0" dirty="0">
+                <a:solidFill>
+                  <a:srgbClr val="000000"/>
+                </a:solidFill>
+                <a:effectLst/>
+                <a:latin typeface="Calibri" panose="020F0502020204030204" pitchFamily="34" charset="0"/>
+                <a:cs typeface="Calibri" panose="020F0502020204030204" pitchFamily="34" charset="0"/>
+              </a:rPr>
+              <a:t>Gateway G-MAX 2000 - surprisingly good and cheap</a:t>
+            </a:r>
+            <a:br>
+              <a:rPr lang="en-US" sz="1400" b="0" i="0" dirty="0">
+                <a:solidFill>
+                  <a:srgbClr val="000000"/>
+                </a:solidFill>
+                <a:effectLst/>
+                <a:latin typeface="Calibri" panose="020F0502020204030204" pitchFamily="34" charset="0"/>
+                <a:cs typeface="Calibri" panose="020F0502020204030204" pitchFamily="34" charset="0"/>
+              </a:rPr>
+            </a:br>
+            <a:r>
+              <a:rPr lang="en-US" sz="1400" b="0" i="0" dirty="0">
+                <a:solidFill>
+                  <a:srgbClr val="000000"/>
+                </a:solidFill>
+                <a:effectLst/>
+                <a:latin typeface="Calibri" panose="020F0502020204030204" pitchFamily="34" charset="0"/>
+                <a:cs typeface="Calibri" panose="020F0502020204030204" pitchFamily="34" charset="0"/>
+              </a:rPr>
+              <a:t>buy at </a:t>
+            </a:r>
+            <a:r>
+              <a:rPr lang="en-US" sz="1400" b="0" i="0" dirty="0" err="1">
+                <a:solidFill>
+                  <a:srgbClr val="000000"/>
+                </a:solidFill>
+                <a:effectLst/>
+                <a:latin typeface="Calibri" panose="020F0502020204030204" pitchFamily="34" charset="0"/>
+                <a:cs typeface="Calibri" panose="020F0502020204030204" pitchFamily="34" charset="0"/>
+              </a:rPr>
+              <a:t>ebay.com</a:t>
+            </a:r>
+            <a:endParaRPr lang="en-US" sz="1400" dirty="0">
+              <a:latin typeface="Calibri" panose="020F0502020204030204" pitchFamily="34" charset="0"/>
+              <a:cs typeface="Calibri" panose="020F0502020204030204" pitchFamily="34" charset="0"/>
+            </a:endParaRPr>
+          </a:p>
+        </p:txBody>
+      </p:sp>
+      <p:pic>
+        <p:nvPicPr>
+          <p:cNvPr id="10" name="Picture 9">
+            <a:extLst>
+              <a:ext uri="{FF2B5EF4-FFF2-40B4-BE49-F238E27FC236}">
+                <a16:creationId xmlns:a16="http://schemas.microsoft.com/office/drawing/2014/main" id="{4AEF22F3-A66F-1206-98BC-782922777E0A}"/>
+              </a:ext>
+            </a:extLst>
+          </p:cNvPr>
+          <p:cNvPicPr>
+            <a:picLocks noChangeAspect="1"/>
+          </p:cNvPicPr>
+          <p:nvPr/>
+        </p:nvPicPr>
+        <p:blipFill>
+          <a:blip r:embed="rId4" cstate="email">
+            <a:extLst>
+              <a:ext uri="{28A0092B-C50C-407E-A947-70E740481C1C}">
+                <a14:useLocalDpi xmlns:a14="http://schemas.microsoft.com/office/drawing/2010/main"/>
+              </a:ext>
+            </a:extLst>
+          </a:blip>
+          <a:stretch>
+            <a:fillRect/>
+          </a:stretch>
+        </p:blipFill>
+        <p:spPr>
+          <a:xfrm>
+            <a:off x="2774193" y="679188"/>
+            <a:ext cx="5316515" cy="4375314"/>
+          </a:xfrm>
+          <a:prstGeom prst="rect">
+            <a:avLst/>
+          </a:prstGeom>
+        </p:spPr>
+      </p:pic>
+    </p:spTree>
+    <p:extLst>
+      <p:ext uri="{BB962C8B-B14F-4D97-AF65-F5344CB8AC3E}">
+        <p14:creationId xmlns:p14="http://schemas.microsoft.com/office/powerpoint/2010/main" val="1847221247"/>
+      </p:ext>
+    </p:extLst>
+  </p:cSld>
+  <p:clrMapOvr>
+    <a:masterClrMapping/>
+  </p:clrMapOvr>
+</p:sld>
+</file>
+
 <file path=ppt/theme/theme1.xml><?xml version="1.0" encoding="utf-8"?>
 <a:theme xmlns:a="http://schemas.openxmlformats.org/drawingml/2006/main" name="Office Theme">
   <a:themeElements>
